--- a/slides/exam_scheduling_research.pptx
+++ b/slides/exam_scheduling_research.pptx
@@ -444,7 +444,7 @@
           <a:p>
             <a:fld id="{5BCAD085-E8A6-8845-BD4E-CB4CCA059FC4}" type="datetimeFigureOut">
               <a:rPr lang="en-US" smtClean="0"/>
-              <a:t>4/22/2026</a:t>
+              <a:t>4/27/2026</a:t>
             </a:fld>
             <a:endParaRPr lang="en-US"/>
           </a:p>
@@ -612,7 +612,7 @@
           <a:p>
             <a:fld id="{5BCAD085-E8A6-8845-BD4E-CB4CCA059FC4}" type="datetimeFigureOut">
               <a:rPr lang="en-US" smtClean="0"/>
-              <a:t>4/22/2026</a:t>
+              <a:t>4/27/2026</a:t>
             </a:fld>
             <a:endParaRPr lang="en-US"/>
           </a:p>
@@ -790,7 +790,7 @@
           <a:p>
             <a:fld id="{5BCAD085-E8A6-8845-BD4E-CB4CCA059FC4}" type="datetimeFigureOut">
               <a:rPr lang="en-US" smtClean="0"/>
-              <a:t>4/22/2026</a:t>
+              <a:t>4/27/2026</a:t>
             </a:fld>
             <a:endParaRPr lang="en-US"/>
           </a:p>
@@ -958,7 +958,7 @@
           <a:p>
             <a:fld id="{5BCAD085-E8A6-8845-BD4E-CB4CCA059FC4}" type="datetimeFigureOut">
               <a:rPr lang="en-US" smtClean="0"/>
-              <a:t>4/22/2026</a:t>
+              <a:t>4/27/2026</a:t>
             </a:fld>
             <a:endParaRPr lang="en-US"/>
           </a:p>
@@ -1203,7 +1203,7 @@
           <a:p>
             <a:fld id="{5BCAD085-E8A6-8845-BD4E-CB4CCA059FC4}" type="datetimeFigureOut">
               <a:rPr lang="en-US" smtClean="0"/>
-              <a:t>4/22/2026</a:t>
+              <a:t>4/27/2026</a:t>
             </a:fld>
             <a:endParaRPr lang="en-US"/>
           </a:p>
@@ -1488,7 +1488,7 @@
           <a:p>
             <a:fld id="{5BCAD085-E8A6-8845-BD4E-CB4CCA059FC4}" type="datetimeFigureOut">
               <a:rPr lang="en-US" smtClean="0"/>
-              <a:t>4/22/2026</a:t>
+              <a:t>4/27/2026</a:t>
             </a:fld>
             <a:endParaRPr lang="en-US"/>
           </a:p>
@@ -1907,7 +1907,7 @@
           <a:p>
             <a:fld id="{5BCAD085-E8A6-8845-BD4E-CB4CCA059FC4}" type="datetimeFigureOut">
               <a:rPr lang="en-US" smtClean="0"/>
-              <a:t>4/22/2026</a:t>
+              <a:t>4/27/2026</a:t>
             </a:fld>
             <a:endParaRPr lang="en-US"/>
           </a:p>
@@ -2024,7 +2024,7 @@
           <a:p>
             <a:fld id="{5BCAD085-E8A6-8845-BD4E-CB4CCA059FC4}" type="datetimeFigureOut">
               <a:rPr lang="en-US" smtClean="0"/>
-              <a:t>4/22/2026</a:t>
+              <a:t>4/27/2026</a:t>
             </a:fld>
             <a:endParaRPr lang="en-US"/>
           </a:p>
@@ -2119,7 +2119,7 @@
           <a:p>
             <a:fld id="{5BCAD085-E8A6-8845-BD4E-CB4CCA059FC4}" type="datetimeFigureOut">
               <a:rPr lang="en-US" smtClean="0"/>
-              <a:t>4/22/2026</a:t>
+              <a:t>4/27/2026</a:t>
             </a:fld>
             <a:endParaRPr lang="en-US"/>
           </a:p>
@@ -2394,7 +2394,7 @@
           <a:p>
             <a:fld id="{5BCAD085-E8A6-8845-BD4E-CB4CCA059FC4}" type="datetimeFigureOut">
               <a:rPr lang="en-US" smtClean="0"/>
-              <a:t>4/22/2026</a:t>
+              <a:t>4/27/2026</a:t>
             </a:fld>
             <a:endParaRPr lang="en-US"/>
           </a:p>
@@ -2646,7 +2646,7 @@
           <a:p>
             <a:fld id="{5BCAD085-E8A6-8845-BD4E-CB4CCA059FC4}" type="datetimeFigureOut">
               <a:rPr lang="en-US" smtClean="0"/>
-              <a:t>4/22/2026</a:t>
+              <a:t>4/27/2026</a:t>
             </a:fld>
             <a:endParaRPr lang="en-US"/>
           </a:p>
@@ -2857,7 +2857,7 @@
           <a:p>
             <a:fld id="{5BCAD085-E8A6-8845-BD4E-CB4CCA059FC4}" type="datetimeFigureOut">
               <a:rPr lang="en-US" smtClean="0"/>
-              <a:t>4/22/2026</a:t>
+              <a:t>4/27/2026</a:t>
             </a:fld>
             <a:endParaRPr lang="en-US"/>
           </a:p>
@@ -3411,7 +3411,7 @@
         <p:spPr>
           <a:xfrm>
             <a:off x="548640" y="1691640"/>
-            <a:ext cx="11094415" cy="292608"/>
+            <a:ext cx="11094415" cy="169277"/>
           </a:xfrm>
           <a:prstGeom prst="rect">
             <a:avLst/>
@@ -3430,13 +3430,22 @@
               </a:lnSpc>
             </a:pPr>
             <a:r>
-              <a:rPr sz="1100" b="1" i="0">
+              <a:rPr lang="en-US" sz="1100" b="1" dirty="0">
                 <a:solidFill>
                   <a:srgbClr val="D4A63F"/>
                 </a:solidFill>
                 <a:latin typeface="Calibri"/>
               </a:rPr>
-              <a:t>TULANE UNIVERSITY   ·   DEPARTMENT OF COMPUTER SCIENCE</a:t>
+              <a:t>TENNESSEE TECH</a:t>
+            </a:r>
+            <a:r>
+              <a:rPr sz="1100" b="1" i="0" dirty="0">
+                <a:solidFill>
+                  <a:srgbClr val="D4A63F"/>
+                </a:solidFill>
+                <a:latin typeface="Calibri"/>
+              </a:rPr>
+              <a:t> UNIVERSITY   ·   DEPARTMENT OF COMPUTER SCIENCE</a:t>
             </a:r>
           </a:p>
         </p:txBody>
@@ -3514,7 +3523,7 @@
               </a:lnSpc>
             </a:pPr>
             <a:r>
-              <a:rPr sz="5800" b="1" i="0">
+              <a:rPr sz="5800" b="1" i="0" dirty="0">
                 <a:solidFill>
                   <a:srgbClr val="F5EFE1"/>
                 </a:solidFill>
@@ -5145,13 +5154,13 @@
   <p:clrMapOvr>
     <a:masterClrMapping/>
   </p:clrMapOvr>
-  <mc:AlternateContent xmlns:mc="http://schemas.openxmlformats.org/markup-compatibility/2006">
-    <mc:Choice xmlns:p159="http://schemas.microsoft.com/office/powerpoint/2015/09/main" Requires="p159">
+  <mc:AlternateContent xmlns:mc="http://schemas.openxmlformats.org/markup-compatibility/2006" xmlns:p159="http://schemas.microsoft.com/office/powerpoint/2015/09/main">
+    <mc:Choice Requires="p159">
       <p:transition xmlns:p14="http://schemas.microsoft.com/office/powerpoint/2010/main" spd="slow" p14:dur="2000">
         <p159:morph option="byObject"/>
       </p:transition>
     </mc:Choice>
-    <mc:Fallback>
+    <mc:Fallback xmlns="">
       <p:transition spd="slow">
         <p:fade/>
       </p:transition>
@@ -6682,13 +6691,13 @@
   <p:clrMapOvr>
     <a:masterClrMapping/>
   </p:clrMapOvr>
-  <mc:AlternateContent xmlns:mc="http://schemas.openxmlformats.org/markup-compatibility/2006">
-    <mc:Choice xmlns:p159="http://schemas.microsoft.com/office/powerpoint/2015/09/main" Requires="p159">
+  <mc:AlternateContent xmlns:mc="http://schemas.openxmlformats.org/markup-compatibility/2006" xmlns:p159="http://schemas.microsoft.com/office/powerpoint/2015/09/main">
+    <mc:Choice Requires="p159">
       <p:transition xmlns:p14="http://schemas.microsoft.com/office/powerpoint/2010/main" spd="slow" p14:dur="2000">
         <p159:morph option="byObject"/>
       </p:transition>
     </mc:Choice>
-    <mc:Fallback>
+    <mc:Fallback xmlns="">
       <p:transition spd="slow">
         <p:fade/>
       </p:transition>
@@ -7574,13 +7583,13 @@
   <p:clrMapOvr>
     <a:masterClrMapping/>
   </p:clrMapOvr>
-  <mc:AlternateContent xmlns:mc="http://schemas.openxmlformats.org/markup-compatibility/2006">
-    <mc:Choice xmlns:p159="http://schemas.microsoft.com/office/powerpoint/2015/09/main" Requires="p159">
+  <mc:AlternateContent xmlns:mc="http://schemas.openxmlformats.org/markup-compatibility/2006" xmlns:p159="http://schemas.microsoft.com/office/powerpoint/2015/09/main">
+    <mc:Choice Requires="p159">
       <p:transition xmlns:p14="http://schemas.microsoft.com/office/powerpoint/2010/main" spd="slow" p14:dur="2000">
         <p159:morph option="byObject"/>
       </p:transition>
     </mc:Choice>
-    <mc:Fallback>
+    <mc:Fallback xmlns="">
       <p:transition spd="slow">
         <p:fade/>
       </p:transition>
@@ -9058,13 +9067,13 @@
   <p:clrMapOvr>
     <a:masterClrMapping/>
   </p:clrMapOvr>
-  <mc:AlternateContent xmlns:mc="http://schemas.openxmlformats.org/markup-compatibility/2006">
-    <mc:Choice xmlns:p159="http://schemas.microsoft.com/office/powerpoint/2015/09/main" Requires="p159">
+  <mc:AlternateContent xmlns:mc="http://schemas.openxmlformats.org/markup-compatibility/2006" xmlns:p159="http://schemas.microsoft.com/office/powerpoint/2015/09/main">
+    <mc:Choice Requires="p159">
       <p:transition xmlns:p14="http://schemas.microsoft.com/office/powerpoint/2010/main" spd="slow" p14:dur="2000">
         <p159:morph option="byObject"/>
       </p:transition>
     </mc:Choice>
-    <mc:Fallback>
+    <mc:Fallback xmlns="">
       <p:transition spd="slow">
         <p:fade/>
       </p:transition>
@@ -13592,13 +13601,13 @@
   <p:clrMapOvr>
     <a:masterClrMapping/>
   </p:clrMapOvr>
-  <mc:AlternateContent xmlns:mc="http://schemas.openxmlformats.org/markup-compatibility/2006">
-    <mc:Choice xmlns:p159="http://schemas.microsoft.com/office/powerpoint/2015/09/main" Requires="p159">
+  <mc:AlternateContent xmlns:mc="http://schemas.openxmlformats.org/markup-compatibility/2006" xmlns:p159="http://schemas.microsoft.com/office/powerpoint/2015/09/main">
+    <mc:Choice Requires="p159">
       <p:transition xmlns:p14="http://schemas.microsoft.com/office/powerpoint/2010/main" spd="slow" p14:dur="2000">
         <p159:morph option="byObject"/>
       </p:transition>
     </mc:Choice>
-    <mc:Fallback>
+    <mc:Fallback xmlns="">
       <p:transition spd="slow">
         <p:fade/>
       </p:transition>
@@ -15128,13 +15137,13 @@
   <p:clrMapOvr>
     <a:masterClrMapping/>
   </p:clrMapOvr>
-  <mc:AlternateContent xmlns:mc="http://schemas.openxmlformats.org/markup-compatibility/2006">
-    <mc:Choice xmlns:p159="http://schemas.microsoft.com/office/powerpoint/2015/09/main" Requires="p159">
+  <mc:AlternateContent xmlns:mc="http://schemas.openxmlformats.org/markup-compatibility/2006" xmlns:p159="http://schemas.microsoft.com/office/powerpoint/2015/09/main">
+    <mc:Choice Requires="p159">
       <p:transition xmlns:p14="http://schemas.microsoft.com/office/powerpoint/2010/main" spd="slow" p14:dur="2000">
         <p159:morph option="byObject"/>
       </p:transition>
     </mc:Choice>
-    <mc:Fallback>
+    <mc:Fallback xmlns="">
       <p:transition spd="slow">
         <p:fade/>
       </p:transition>
@@ -15833,13 +15842,13 @@
   <p:clrMapOvr>
     <a:masterClrMapping/>
   </p:clrMapOvr>
-  <mc:AlternateContent xmlns:mc="http://schemas.openxmlformats.org/markup-compatibility/2006">
-    <mc:Choice xmlns:p159="http://schemas.microsoft.com/office/powerpoint/2015/09/main" Requires="p159">
+  <mc:AlternateContent xmlns:mc="http://schemas.openxmlformats.org/markup-compatibility/2006" xmlns:p159="http://schemas.microsoft.com/office/powerpoint/2015/09/main">
+    <mc:Choice Requires="p159">
       <p:transition xmlns:p14="http://schemas.microsoft.com/office/powerpoint/2010/main" spd="slow" p14:dur="2000">
         <p159:morph option="byObject"/>
       </p:transition>
     </mc:Choice>
-    <mc:Fallback>
+    <mc:Fallback xmlns="">
       <p:transition spd="slow">
         <p:fade/>
       </p:transition>
@@ -16778,13 +16787,13 @@
   <p:clrMapOvr>
     <a:masterClrMapping/>
   </p:clrMapOvr>
-  <mc:AlternateContent xmlns:mc="http://schemas.openxmlformats.org/markup-compatibility/2006">
-    <mc:Choice xmlns:p159="http://schemas.microsoft.com/office/powerpoint/2015/09/main" Requires="p159">
+  <mc:AlternateContent xmlns:mc="http://schemas.openxmlformats.org/markup-compatibility/2006" xmlns:p159="http://schemas.microsoft.com/office/powerpoint/2015/09/main">
+    <mc:Choice Requires="p159">
       <p:transition xmlns:p14="http://schemas.microsoft.com/office/powerpoint/2010/main" spd="slow" p14:dur="2000">
         <p159:morph option="byObject"/>
       </p:transition>
     </mc:Choice>
-    <mc:Fallback>
+    <mc:Fallback xmlns="">
       <p:transition spd="slow">
         <p:fade/>
       </p:transition>
@@ -17979,13 +17988,13 @@
   <p:clrMapOvr>
     <a:masterClrMapping/>
   </p:clrMapOvr>
-  <mc:AlternateContent xmlns:mc="http://schemas.openxmlformats.org/markup-compatibility/2006">
-    <mc:Choice xmlns:p159="http://schemas.microsoft.com/office/powerpoint/2015/09/main" Requires="p159">
+  <mc:AlternateContent xmlns:mc="http://schemas.openxmlformats.org/markup-compatibility/2006" xmlns:p159="http://schemas.microsoft.com/office/powerpoint/2015/09/main">
+    <mc:Choice Requires="p159">
       <p:transition xmlns:p14="http://schemas.microsoft.com/office/powerpoint/2010/main" spd="slow" p14:dur="2000">
         <p159:morph option="byObject"/>
       </p:transition>
     </mc:Choice>
-    <mc:Fallback>
+    <mc:Fallback xmlns="">
       <p:transition spd="slow">
         <p:fade/>
       </p:transition>
@@ -19974,13 +19983,13 @@
   <p:clrMapOvr>
     <a:masterClrMapping/>
   </p:clrMapOvr>
-  <mc:AlternateContent xmlns:mc="http://schemas.openxmlformats.org/markup-compatibility/2006">
-    <mc:Choice xmlns:p159="http://schemas.microsoft.com/office/powerpoint/2015/09/main" Requires="p159">
+  <mc:AlternateContent xmlns:mc="http://schemas.openxmlformats.org/markup-compatibility/2006" xmlns:p159="http://schemas.microsoft.com/office/powerpoint/2015/09/main">
+    <mc:Choice Requires="p159">
       <p:transition xmlns:p14="http://schemas.microsoft.com/office/powerpoint/2010/main" spd="slow" p14:dur="2000">
         <p159:morph option="byObject"/>
       </p:transition>
     </mc:Choice>
-    <mc:Fallback>
+    <mc:Fallback xmlns="">
       <p:transition spd="slow">
         <p:fade/>
       </p:transition>
@@ -21279,13 +21288,13 @@
   <p:clrMapOvr>
     <a:masterClrMapping/>
   </p:clrMapOvr>
-  <mc:AlternateContent xmlns:mc="http://schemas.openxmlformats.org/markup-compatibility/2006">
-    <mc:Choice xmlns:p159="http://schemas.microsoft.com/office/powerpoint/2015/09/main" Requires="p159">
+  <mc:AlternateContent xmlns:mc="http://schemas.openxmlformats.org/markup-compatibility/2006" xmlns:p159="http://schemas.microsoft.com/office/powerpoint/2015/09/main">
+    <mc:Choice Requires="p159">
       <p:transition xmlns:p14="http://schemas.microsoft.com/office/powerpoint/2010/main" spd="slow" p14:dur="2000">
         <p159:morph option="byObject"/>
       </p:transition>
     </mc:Choice>
-    <mc:Fallback>
+    <mc:Fallback xmlns="">
       <p:transition spd="slow">
         <p:fade/>
       </p:transition>
@@ -23923,13 +23932,13 @@
   <p:clrMapOvr>
     <a:masterClrMapping/>
   </p:clrMapOvr>
-  <mc:AlternateContent xmlns:mc="http://schemas.openxmlformats.org/markup-compatibility/2006">
-    <mc:Choice xmlns:p159="http://schemas.microsoft.com/office/powerpoint/2015/09/main" Requires="p159">
+  <mc:AlternateContent xmlns:mc="http://schemas.openxmlformats.org/markup-compatibility/2006" xmlns:p159="http://schemas.microsoft.com/office/powerpoint/2015/09/main">
+    <mc:Choice Requires="p159">
       <p:transition xmlns:p14="http://schemas.microsoft.com/office/powerpoint/2010/main" spd="slow" p14:dur="2000">
         <p159:morph option="byObject"/>
       </p:transition>
     </mc:Choice>
-    <mc:Fallback>
+    <mc:Fallback xmlns="">
       <p:transition spd="slow">
         <p:fade/>
       </p:transition>
@@ -25178,13 +25187,13 @@
   <p:clrMapOvr>
     <a:masterClrMapping/>
   </p:clrMapOvr>
-  <mc:AlternateContent xmlns:mc="http://schemas.openxmlformats.org/markup-compatibility/2006">
-    <mc:Choice xmlns:p159="http://schemas.microsoft.com/office/powerpoint/2015/09/main" Requires="p159">
+  <mc:AlternateContent xmlns:mc="http://schemas.openxmlformats.org/markup-compatibility/2006" xmlns:p159="http://schemas.microsoft.com/office/powerpoint/2015/09/main">
+    <mc:Choice Requires="p159">
       <p:transition xmlns:p14="http://schemas.microsoft.com/office/powerpoint/2010/main" spd="slow" p14:dur="2000">
         <p159:morph option="byObject"/>
       </p:transition>
     </mc:Choice>
-    <mc:Fallback>
+    <mc:Fallback xmlns="">
       <p:transition spd="slow">
         <p:fade/>
       </p:transition>
@@ -26466,13 +26475,13 @@
   <p:clrMapOvr>
     <a:masterClrMapping/>
   </p:clrMapOvr>
-  <mc:AlternateContent xmlns:mc="http://schemas.openxmlformats.org/markup-compatibility/2006">
-    <mc:Choice xmlns:p159="http://schemas.microsoft.com/office/powerpoint/2015/09/main" Requires="p159">
+  <mc:AlternateContent xmlns:mc="http://schemas.openxmlformats.org/markup-compatibility/2006" xmlns:p159="http://schemas.microsoft.com/office/powerpoint/2015/09/main">
+    <mc:Choice Requires="p159">
       <p:transition xmlns:p14="http://schemas.microsoft.com/office/powerpoint/2010/main" spd="slow" p14:dur="2000">
         <p159:morph option="byObject"/>
       </p:transition>
     </mc:Choice>
-    <mc:Fallback>
+    <mc:Fallback xmlns="">
       <p:transition spd="slow">
         <p:fade/>
       </p:transition>
@@ -27892,13 +27901,13 @@
   <p:clrMapOvr>
     <a:masterClrMapping/>
   </p:clrMapOvr>
-  <mc:AlternateContent xmlns:mc="http://schemas.openxmlformats.org/markup-compatibility/2006">
-    <mc:Choice xmlns:p159="http://schemas.microsoft.com/office/powerpoint/2015/09/main" Requires="p159">
+  <mc:AlternateContent xmlns:mc="http://schemas.openxmlformats.org/markup-compatibility/2006" xmlns:p159="http://schemas.microsoft.com/office/powerpoint/2015/09/main">
+    <mc:Choice Requires="p159">
       <p:transition xmlns:p14="http://schemas.microsoft.com/office/powerpoint/2010/main" spd="slow" p14:dur="2000">
         <p159:morph option="byObject"/>
       </p:transition>
     </mc:Choice>
-    <mc:Fallback>
+    <mc:Fallback xmlns="">
       <p:transition spd="slow">
         <p:fade/>
       </p:transition>

--- a/slides/exam_scheduling_research.pptx
+++ b/slides/exam_scheduling_research.pptx
@@ -141,7 +141,7 @@
 <file path=ppt/revisionInfo.xml><?xml version="1.0" encoding="utf-8"?>
 <p1510:revInfo xmlns:a="http://schemas.openxmlformats.org/drawingml/2006/main" xmlns:r="http://schemas.openxmlformats.org/officeDocument/2006/relationships" xmlns:p1510="http://schemas.microsoft.com/office/powerpoint/2015/10/main">
   <p1510:revLst>
-    <p1510:client id="{9A7C5FE5-52AD-4634-9AAF-B29525EAADA9}" v="2" dt="2026-04-22T05:26:30.540"/>
+    <p1510:client id="{0660441A-A1DB-4CC9-AFED-3912C735DF6F}" v="1" dt="2026-04-27T20:08:29.366"/>
   </p1510:revLst>
 </p1510:revInfo>
 </file>
@@ -151,110 +151,110 @@
   <pc:docChgLst>
     <pc:chgData name="Hoang Le" userId="12458f32aff32e49" providerId="LiveId" clId="{7D7A4E7E-1528-4E6A-8A43-1A20864013E4}"/>
     <pc:docChg chg="modSld">
-      <pc:chgData name="Hoang Le" userId="12458f32aff32e49" providerId="LiveId" clId="{7D7A4E7E-1528-4E6A-8A43-1A20864013E4}" dt="2026-04-22T05:26:30.538" v="1"/>
+      <pc:chgData name="Hoang Le" userId="12458f32aff32e49" providerId="LiveId" clId="{7D7A4E7E-1528-4E6A-8A43-1A20864013E4}" dt="2026-04-27T20:08:29.361" v="0"/>
       <pc:docMkLst>
         <pc:docMk/>
       </pc:docMkLst>
       <pc:sldChg chg="modTransition">
-        <pc:chgData name="Hoang Le" userId="12458f32aff32e49" providerId="LiveId" clId="{7D7A4E7E-1528-4E6A-8A43-1A20864013E4}" dt="2026-04-22T05:26:30.538" v="1"/>
+        <pc:chgData name="Hoang Le" userId="12458f32aff32e49" providerId="LiveId" clId="{7D7A4E7E-1528-4E6A-8A43-1A20864013E4}" dt="2026-04-27T20:08:29.361" v="0"/>
         <pc:sldMkLst>
           <pc:docMk/>
           <pc:sldMk cId="0" sldId="257"/>
         </pc:sldMkLst>
       </pc:sldChg>
       <pc:sldChg chg="modTransition">
-        <pc:chgData name="Hoang Le" userId="12458f32aff32e49" providerId="LiveId" clId="{7D7A4E7E-1528-4E6A-8A43-1A20864013E4}" dt="2026-04-22T05:26:30.538" v="1"/>
+        <pc:chgData name="Hoang Le" userId="12458f32aff32e49" providerId="LiveId" clId="{7D7A4E7E-1528-4E6A-8A43-1A20864013E4}" dt="2026-04-27T20:08:29.361" v="0"/>
         <pc:sldMkLst>
           <pc:docMk/>
           <pc:sldMk cId="0" sldId="258"/>
         </pc:sldMkLst>
       </pc:sldChg>
       <pc:sldChg chg="modTransition">
-        <pc:chgData name="Hoang Le" userId="12458f32aff32e49" providerId="LiveId" clId="{7D7A4E7E-1528-4E6A-8A43-1A20864013E4}" dt="2026-04-22T05:26:30.538" v="1"/>
+        <pc:chgData name="Hoang Le" userId="12458f32aff32e49" providerId="LiveId" clId="{7D7A4E7E-1528-4E6A-8A43-1A20864013E4}" dt="2026-04-27T20:08:29.361" v="0"/>
         <pc:sldMkLst>
           <pc:docMk/>
           <pc:sldMk cId="0" sldId="259"/>
         </pc:sldMkLst>
       </pc:sldChg>
       <pc:sldChg chg="modTransition">
-        <pc:chgData name="Hoang Le" userId="12458f32aff32e49" providerId="LiveId" clId="{7D7A4E7E-1528-4E6A-8A43-1A20864013E4}" dt="2026-04-22T05:26:30.538" v="1"/>
+        <pc:chgData name="Hoang Le" userId="12458f32aff32e49" providerId="LiveId" clId="{7D7A4E7E-1528-4E6A-8A43-1A20864013E4}" dt="2026-04-27T20:08:29.361" v="0"/>
         <pc:sldMkLst>
           <pc:docMk/>
           <pc:sldMk cId="0" sldId="260"/>
         </pc:sldMkLst>
       </pc:sldChg>
       <pc:sldChg chg="modTransition">
-        <pc:chgData name="Hoang Le" userId="12458f32aff32e49" providerId="LiveId" clId="{7D7A4E7E-1528-4E6A-8A43-1A20864013E4}" dt="2026-04-22T05:26:30.538" v="1"/>
+        <pc:chgData name="Hoang Le" userId="12458f32aff32e49" providerId="LiveId" clId="{7D7A4E7E-1528-4E6A-8A43-1A20864013E4}" dt="2026-04-27T20:08:29.361" v="0"/>
         <pc:sldMkLst>
           <pc:docMk/>
           <pc:sldMk cId="0" sldId="261"/>
         </pc:sldMkLst>
       </pc:sldChg>
       <pc:sldChg chg="modTransition">
-        <pc:chgData name="Hoang Le" userId="12458f32aff32e49" providerId="LiveId" clId="{7D7A4E7E-1528-4E6A-8A43-1A20864013E4}" dt="2026-04-22T05:26:30.538" v="1"/>
+        <pc:chgData name="Hoang Le" userId="12458f32aff32e49" providerId="LiveId" clId="{7D7A4E7E-1528-4E6A-8A43-1A20864013E4}" dt="2026-04-27T20:08:29.361" v="0"/>
         <pc:sldMkLst>
           <pc:docMk/>
           <pc:sldMk cId="0" sldId="262"/>
         </pc:sldMkLst>
       </pc:sldChg>
       <pc:sldChg chg="modTransition">
-        <pc:chgData name="Hoang Le" userId="12458f32aff32e49" providerId="LiveId" clId="{7D7A4E7E-1528-4E6A-8A43-1A20864013E4}" dt="2026-04-22T05:26:30.538" v="1"/>
+        <pc:chgData name="Hoang Le" userId="12458f32aff32e49" providerId="LiveId" clId="{7D7A4E7E-1528-4E6A-8A43-1A20864013E4}" dt="2026-04-27T20:08:29.361" v="0"/>
         <pc:sldMkLst>
           <pc:docMk/>
           <pc:sldMk cId="0" sldId="263"/>
         </pc:sldMkLst>
       </pc:sldChg>
       <pc:sldChg chg="modTransition">
-        <pc:chgData name="Hoang Le" userId="12458f32aff32e49" providerId="LiveId" clId="{7D7A4E7E-1528-4E6A-8A43-1A20864013E4}" dt="2026-04-22T05:26:30.538" v="1"/>
+        <pc:chgData name="Hoang Le" userId="12458f32aff32e49" providerId="LiveId" clId="{7D7A4E7E-1528-4E6A-8A43-1A20864013E4}" dt="2026-04-27T20:08:29.361" v="0"/>
         <pc:sldMkLst>
           <pc:docMk/>
           <pc:sldMk cId="0" sldId="264"/>
         </pc:sldMkLst>
       </pc:sldChg>
       <pc:sldChg chg="modTransition">
-        <pc:chgData name="Hoang Le" userId="12458f32aff32e49" providerId="LiveId" clId="{7D7A4E7E-1528-4E6A-8A43-1A20864013E4}" dt="2026-04-22T05:26:30.538" v="1"/>
+        <pc:chgData name="Hoang Le" userId="12458f32aff32e49" providerId="LiveId" clId="{7D7A4E7E-1528-4E6A-8A43-1A20864013E4}" dt="2026-04-27T20:08:29.361" v="0"/>
         <pc:sldMkLst>
           <pc:docMk/>
           <pc:sldMk cId="0" sldId="265"/>
         </pc:sldMkLst>
       </pc:sldChg>
       <pc:sldChg chg="modTransition">
-        <pc:chgData name="Hoang Le" userId="12458f32aff32e49" providerId="LiveId" clId="{7D7A4E7E-1528-4E6A-8A43-1A20864013E4}" dt="2026-04-22T05:26:13.917" v="0"/>
+        <pc:chgData name="Hoang Le" userId="12458f32aff32e49" providerId="LiveId" clId="{7D7A4E7E-1528-4E6A-8A43-1A20864013E4}" dt="2026-04-27T20:08:29.361" v="0"/>
         <pc:sldMkLst>
           <pc:docMk/>
           <pc:sldMk cId="0" sldId="266"/>
         </pc:sldMkLst>
       </pc:sldChg>
       <pc:sldChg chg="modTransition">
-        <pc:chgData name="Hoang Le" userId="12458f32aff32e49" providerId="LiveId" clId="{7D7A4E7E-1528-4E6A-8A43-1A20864013E4}" dt="2026-04-22T05:26:13.917" v="0"/>
+        <pc:chgData name="Hoang Le" userId="12458f32aff32e49" providerId="LiveId" clId="{7D7A4E7E-1528-4E6A-8A43-1A20864013E4}" dt="2026-04-27T20:08:29.361" v="0"/>
         <pc:sldMkLst>
           <pc:docMk/>
           <pc:sldMk cId="0" sldId="267"/>
         </pc:sldMkLst>
       </pc:sldChg>
       <pc:sldChg chg="modTransition">
-        <pc:chgData name="Hoang Le" userId="12458f32aff32e49" providerId="LiveId" clId="{7D7A4E7E-1528-4E6A-8A43-1A20864013E4}" dt="2026-04-22T05:26:13.917" v="0"/>
+        <pc:chgData name="Hoang Le" userId="12458f32aff32e49" providerId="LiveId" clId="{7D7A4E7E-1528-4E6A-8A43-1A20864013E4}" dt="2026-04-27T20:08:29.361" v="0"/>
         <pc:sldMkLst>
           <pc:docMk/>
           <pc:sldMk cId="0" sldId="268"/>
         </pc:sldMkLst>
       </pc:sldChg>
       <pc:sldChg chg="modTransition">
-        <pc:chgData name="Hoang Le" userId="12458f32aff32e49" providerId="LiveId" clId="{7D7A4E7E-1528-4E6A-8A43-1A20864013E4}" dt="2026-04-22T05:26:13.917" v="0"/>
+        <pc:chgData name="Hoang Le" userId="12458f32aff32e49" providerId="LiveId" clId="{7D7A4E7E-1528-4E6A-8A43-1A20864013E4}" dt="2026-04-27T20:08:29.361" v="0"/>
         <pc:sldMkLst>
           <pc:docMk/>
           <pc:sldMk cId="0" sldId="269"/>
         </pc:sldMkLst>
       </pc:sldChg>
       <pc:sldChg chg="modTransition">
-        <pc:chgData name="Hoang Le" userId="12458f32aff32e49" providerId="LiveId" clId="{7D7A4E7E-1528-4E6A-8A43-1A20864013E4}" dt="2026-04-22T05:26:13.917" v="0"/>
+        <pc:chgData name="Hoang Le" userId="12458f32aff32e49" providerId="LiveId" clId="{7D7A4E7E-1528-4E6A-8A43-1A20864013E4}" dt="2026-04-27T20:08:29.361" v="0"/>
         <pc:sldMkLst>
           <pc:docMk/>
           <pc:sldMk cId="0" sldId="270"/>
         </pc:sldMkLst>
       </pc:sldChg>
       <pc:sldChg chg="modTransition">
-        <pc:chgData name="Hoang Le" userId="12458f32aff32e49" providerId="LiveId" clId="{7D7A4E7E-1528-4E6A-8A43-1A20864013E4}" dt="2026-04-22T05:26:13.917" v="0"/>
+        <pc:chgData name="Hoang Le" userId="12458f32aff32e49" providerId="LiveId" clId="{7D7A4E7E-1528-4E6A-8A43-1A20864013E4}" dt="2026-04-27T20:08:29.361" v="0"/>
         <pc:sldMkLst>
           <pc:docMk/>
           <pc:sldMk cId="0" sldId="271"/>
@@ -3411,7 +3411,7 @@
         <p:spPr>
           <a:xfrm>
             <a:off x="548640" y="1691640"/>
-            <a:ext cx="11094415" cy="169277"/>
+            <a:ext cx="11094415" cy="292608"/>
           </a:xfrm>
           <a:prstGeom prst="rect">
             <a:avLst/>
@@ -3430,22 +3430,13 @@
               </a:lnSpc>
             </a:pPr>
             <a:r>
-              <a:rPr lang="en-US" sz="1100" b="1" dirty="0">
+              <a:rPr sz="1100" b="1" i="0">
                 <a:solidFill>
                   <a:srgbClr val="D4A63F"/>
                 </a:solidFill>
                 <a:latin typeface="Calibri"/>
               </a:rPr>
-              <a:t>TENNESSEE TECH</a:t>
-            </a:r>
-            <a:r>
-              <a:rPr sz="1100" b="1" i="0" dirty="0">
-                <a:solidFill>
-                  <a:srgbClr val="D4A63F"/>
-                </a:solidFill>
-                <a:latin typeface="Calibri"/>
-              </a:rPr>
-              <a:t> UNIVERSITY   ·   DEPARTMENT OF COMPUTER SCIENCE</a:t>
+              <a:t>TENNESSEE TECH. UNIVERSITY   ·   DEPARTMENT OF COMPUTER SCIENCE</a:t>
             </a:r>
           </a:p>
         </p:txBody>
@@ -3523,7 +3514,7 @@
               </a:lnSpc>
             </a:pPr>
             <a:r>
-              <a:rPr sz="5800" b="1" i="0" dirty="0">
+              <a:rPr sz="5800" b="1" i="0">
                 <a:solidFill>
                   <a:srgbClr val="F5EFE1"/>
                 </a:solidFill>
@@ -3692,6 +3683,45 @@
                 <a:latin typeface="Calibri"/>
               </a:rPr>
               <a:t>APRIL 2026   ·   CSC 2400   ·   TERM PROJECT</a:t>
+            </a:r>
+          </a:p>
+        </p:txBody>
+      </p:sp>
+      <p:sp>
+        <p:nvSpPr>
+          <p:cNvPr id="13" name="TextBox 12"/>
+          <p:cNvSpPr txBox="1"/>
+          <p:nvPr/>
+        </p:nvSpPr>
+        <p:spPr>
+          <a:xfrm>
+            <a:off x="548640" y="5989320"/>
+            <a:ext cx="11094415" cy="365760"/>
+          </a:xfrm>
+          <a:prstGeom prst="rect">
+            <a:avLst/>
+          </a:prstGeom>
+          <a:noFill/>
+        </p:spPr>
+        <p:txBody>
+          <a:bodyPr wrap="square" lIns="0" tIns="0" rIns="0" bIns="0" anchor="t">
+            <a:spAutoFit/>
+          </a:bodyPr>
+          <a:lstStyle/>
+          <a:p>
+            <a:pPr algn="ctr">
+              <a:lnSpc>
+                <a:spcPct val="125000"/>
+              </a:lnSpc>
+            </a:pPr>
+            <a:r>
+              <a:rPr sz="1000" b="0" i="1">
+                <a:solidFill>
+                  <a:srgbClr val="A5A092"/>
+                </a:solidFill>
+                <a:latin typeface="Georgia"/>
+              </a:rPr>
+              <a:t>GenAI assistance (Claude, ChatGPT) used for brainstorming, research, code implementation, experimental design, plotting, data analysis, and report / slide drafting.</a:t>
             </a:r>
           </a:p>
         </p:txBody>
@@ -5154,13 +5184,13 @@
   <p:clrMapOvr>
     <a:masterClrMapping/>
   </p:clrMapOvr>
-  <mc:AlternateContent xmlns:mc="http://schemas.openxmlformats.org/markup-compatibility/2006" xmlns:p159="http://schemas.microsoft.com/office/powerpoint/2015/09/main">
-    <mc:Choice Requires="p159">
+  <mc:AlternateContent xmlns:mc="http://schemas.openxmlformats.org/markup-compatibility/2006">
+    <mc:Choice xmlns:p159="http://schemas.microsoft.com/office/powerpoint/2015/09/main" Requires="p159">
       <p:transition xmlns:p14="http://schemas.microsoft.com/office/powerpoint/2010/main" spd="slow" p14:dur="2000">
         <p159:morph option="byObject"/>
       </p:transition>
     </mc:Choice>
-    <mc:Fallback xmlns="">
+    <mc:Fallback>
       <p:transition spd="slow">
         <p:fade/>
       </p:transition>
@@ -6691,13 +6721,13 @@
   <p:clrMapOvr>
     <a:masterClrMapping/>
   </p:clrMapOvr>
-  <mc:AlternateContent xmlns:mc="http://schemas.openxmlformats.org/markup-compatibility/2006" xmlns:p159="http://schemas.microsoft.com/office/powerpoint/2015/09/main">
-    <mc:Choice Requires="p159">
+  <mc:AlternateContent xmlns:mc="http://schemas.openxmlformats.org/markup-compatibility/2006">
+    <mc:Choice xmlns:p159="http://schemas.microsoft.com/office/powerpoint/2015/09/main" Requires="p159">
       <p:transition xmlns:p14="http://schemas.microsoft.com/office/powerpoint/2010/main" spd="slow" p14:dur="2000">
         <p159:morph option="byObject"/>
       </p:transition>
     </mc:Choice>
-    <mc:Fallback xmlns="">
+    <mc:Fallback>
       <p:transition spd="slow">
         <p:fade/>
       </p:transition>
@@ -7583,13 +7613,13 @@
   <p:clrMapOvr>
     <a:masterClrMapping/>
   </p:clrMapOvr>
-  <mc:AlternateContent xmlns:mc="http://schemas.openxmlformats.org/markup-compatibility/2006" xmlns:p159="http://schemas.microsoft.com/office/powerpoint/2015/09/main">
-    <mc:Choice Requires="p159">
+  <mc:AlternateContent xmlns:mc="http://schemas.openxmlformats.org/markup-compatibility/2006">
+    <mc:Choice xmlns:p159="http://schemas.microsoft.com/office/powerpoint/2015/09/main" Requires="p159">
       <p:transition xmlns:p14="http://schemas.microsoft.com/office/powerpoint/2010/main" spd="slow" p14:dur="2000">
         <p159:morph option="byObject"/>
       </p:transition>
     </mc:Choice>
-    <mc:Fallback xmlns="">
+    <mc:Fallback>
       <p:transition spd="slow">
         <p:fade/>
       </p:transition>
@@ -9067,13 +9097,13 @@
   <p:clrMapOvr>
     <a:masterClrMapping/>
   </p:clrMapOvr>
-  <mc:AlternateContent xmlns:mc="http://schemas.openxmlformats.org/markup-compatibility/2006" xmlns:p159="http://schemas.microsoft.com/office/powerpoint/2015/09/main">
-    <mc:Choice Requires="p159">
+  <mc:AlternateContent xmlns:mc="http://schemas.openxmlformats.org/markup-compatibility/2006">
+    <mc:Choice xmlns:p159="http://schemas.microsoft.com/office/powerpoint/2015/09/main" Requires="p159">
       <p:transition xmlns:p14="http://schemas.microsoft.com/office/powerpoint/2010/main" spd="slow" p14:dur="2000">
         <p159:morph option="byObject"/>
       </p:transition>
     </mc:Choice>
-    <mc:Fallback xmlns="">
+    <mc:Fallback>
       <p:transition spd="slow">
         <p:fade/>
       </p:transition>
@@ -13601,13 +13631,13 @@
   <p:clrMapOvr>
     <a:masterClrMapping/>
   </p:clrMapOvr>
-  <mc:AlternateContent xmlns:mc="http://schemas.openxmlformats.org/markup-compatibility/2006" xmlns:p159="http://schemas.microsoft.com/office/powerpoint/2015/09/main">
-    <mc:Choice Requires="p159">
+  <mc:AlternateContent xmlns:mc="http://schemas.openxmlformats.org/markup-compatibility/2006">
+    <mc:Choice xmlns:p159="http://schemas.microsoft.com/office/powerpoint/2015/09/main" Requires="p159">
       <p:transition xmlns:p14="http://schemas.microsoft.com/office/powerpoint/2010/main" spd="slow" p14:dur="2000">
         <p159:morph option="byObject"/>
       </p:transition>
     </mc:Choice>
-    <mc:Fallback xmlns="">
+    <mc:Fallback>
       <p:transition spd="slow">
         <p:fade/>
       </p:transition>
@@ -15137,13 +15167,13 @@
   <p:clrMapOvr>
     <a:masterClrMapping/>
   </p:clrMapOvr>
-  <mc:AlternateContent xmlns:mc="http://schemas.openxmlformats.org/markup-compatibility/2006" xmlns:p159="http://schemas.microsoft.com/office/powerpoint/2015/09/main">
-    <mc:Choice Requires="p159">
+  <mc:AlternateContent xmlns:mc="http://schemas.openxmlformats.org/markup-compatibility/2006">
+    <mc:Choice xmlns:p159="http://schemas.microsoft.com/office/powerpoint/2015/09/main" Requires="p159">
       <p:transition xmlns:p14="http://schemas.microsoft.com/office/powerpoint/2010/main" spd="slow" p14:dur="2000">
         <p159:morph option="byObject"/>
       </p:transition>
     </mc:Choice>
-    <mc:Fallback xmlns="">
+    <mc:Fallback>
       <p:transition spd="slow">
         <p:fade/>
       </p:transition>
@@ -15535,7 +15565,7 @@
                 </a:solidFill>
                 <a:latin typeface="Georgia"/>
               </a:rPr>
-              <a:t>[1]  McCollum, B. et al. (2010). “A new model for automated examination timetabling.”  Annals of Operations Research, 194(1), 291–315. — ITC 2007 dataset &amp; evaluator.</a:t>
+              <a:t>[1]  Burke, E. &amp; Bykov, Y. (2008). “A Late Acceptance Strategy in Hill-Climbing for Exam Timetabling Problems.”  PATAT.</a:t>
             </a:r>
           </a:p>
           <a:p>
@@ -15564,7 +15594,7 @@
                 </a:solidFill>
                 <a:latin typeface="Georgia"/>
               </a:rPr>
-              <a:t>[2]  Carter, M., Laporte, G. &amp; Lee, S. (1996). “Examination Timetabling: Algorithmic Strategies &amp; Applications.”  J. Oper. Res. Soc., 47(3), 373–383.</a:t>
+              <a:t>[2]  Dueck, G. (1993). “New Optimization Heuristics: The Great Deluge Algorithm and the Record-to-Record Travel.”  J. Computational Physics, 104(1), 86–92.</a:t>
             </a:r>
           </a:p>
           <a:p>
@@ -15593,7 +15623,7 @@
                 </a:solidFill>
                 <a:latin typeface="Georgia"/>
               </a:rPr>
-              <a:t>[3]  Burke, E. et al. (2010). “Hybrid variable neighbourhood approaches to university exam timetabling.”  European J. Oper. Res., 206(1), 46–53.</a:t>
+              <a:t>[3]  Glover, F. (1989). “Tabu Search — Part I.”  ORSA J. on Computing, 1(3), 190–206.</a:t>
             </a:r>
           </a:p>
           <a:p>
@@ -15622,7 +15652,7 @@
                 </a:solidFill>
                 <a:latin typeface="Georgia"/>
               </a:rPr>
-              <a:t>[4]  Perron, L. &amp; Furnon, V. (2024). OR-Tools CP-SAT Solver.  Google. developers.google.com/optimization.</a:t>
+              <a:t>[4]  Hansen, P. &amp; Mladenović, N. (2001). “Variable Neighborhood Search: Principles &amp; Applications.”  European J. Oper. Res., 130(3), 449–467.</a:t>
             </a:r>
           </a:p>
         </p:txBody>
@@ -15661,7 +15691,7 @@
                 </a:solidFill>
                 <a:latin typeface="Georgia"/>
               </a:rPr>
-              <a:t>[5]  Glover, F. (1989). “Tabu Search — Part I.”  ORSA J. on Computing, 1(3), 190–206.</a:t>
+              <a:t>[5]  Karaboga, D. (2005). “An Idea Based on Honey Bee Swarm for Numerical Optimization.”  Tech. Rep. TR06, Erciyes Univ.</a:t>
             </a:r>
           </a:p>
           <a:p>
@@ -15719,7 +15749,7 @@
                 </a:solidFill>
                 <a:latin typeface="Georgia"/>
               </a:rPr>
-              <a:t>[7]  Ropke, S. &amp; Pisinger, D. (2006). “An Adaptive Large Neighborhood Search Heuristic for the PDPTW.”  Transportation Science, 40(4), 455–472.</a:t>
+              <a:t>[7]  McCollum, B. et al. (2010). “Setting the Research Agenda in Automated Timetabling: ITC2.”  INFORMS J. Computing, 22(1), 120–130. — ITC 2007 dataset &amp; evaluator.</a:t>
             </a:r>
           </a:p>
           <a:p>
@@ -15748,7 +15778,7 @@
                 </a:solidFill>
                 <a:latin typeface="Georgia"/>
               </a:rPr>
-              <a:t>[8]  Karaboga, D. &amp; Basturk, B. (2007). “A powerful and efficient algorithm for numerical function optimization: Artificial Bee Colony.”  J. Global Optimization, 39(3), 459–471.</a:t>
+              <a:t>[8]  Perron, L. &amp; Furnon, V. (2024). OR-Tools CP-SAT Solver.  Google. developers.google.com/optimization.</a:t>
             </a:r>
           </a:p>
         </p:txBody>
@@ -15761,7 +15791,7 @@
         </p:nvSpPr>
         <p:spPr>
           <a:xfrm>
-            <a:off x="5912967" y="6126480"/>
+            <a:off x="5912967" y="6053328"/>
             <a:ext cx="365760" cy="19050"/>
           </a:xfrm>
           <a:prstGeom prst="rect">
@@ -15806,8 +15836,8 @@
         </p:nvSpPr>
         <p:spPr>
           <a:xfrm>
-            <a:off x="0" y="6217920"/>
-            <a:ext cx="12191695" cy="320040"/>
+            <a:off x="0" y="6144768"/>
+            <a:ext cx="12191695" cy="274320"/>
           </a:xfrm>
           <a:prstGeom prst="rect">
             <a:avLst/>
@@ -15826,7 +15856,46 @@
               </a:lnSpc>
             </a:pPr>
             <a:r>
-              <a:rPr sz="1300" b="1" i="0">
+              <a:rPr sz="900" b="0" i="1">
+                <a:solidFill>
+                  <a:srgbClr val="A5A092"/>
+                </a:solidFill>
+                <a:latin typeface="Georgia"/>
+              </a:rPr>
+              <a:t>GenAI assistance (Claude, ChatGPT) used throughout: brainstorming, code, plotting, analysis, slide drafting.</a:t>
+            </a:r>
+          </a:p>
+        </p:txBody>
+      </p:sp>
+      <p:sp>
+        <p:nvSpPr>
+          <p:cNvPr id="14" name="TextBox 13"/>
+          <p:cNvSpPr txBox="1"/>
+          <p:nvPr/>
+        </p:nvSpPr>
+        <p:spPr>
+          <a:xfrm>
+            <a:off x="0" y="6446520"/>
+            <a:ext cx="12191695" cy="274320"/>
+          </a:xfrm>
+          <a:prstGeom prst="rect">
+            <a:avLst/>
+          </a:prstGeom>
+          <a:noFill/>
+        </p:spPr>
+        <p:txBody>
+          <a:bodyPr wrap="square" lIns="0" tIns="0" rIns="0" bIns="0" anchor="t">
+            <a:spAutoFit/>
+          </a:bodyPr>
+          <a:lstStyle/>
+          <a:p>
+            <a:pPr algn="ctr">
+              <a:lnSpc>
+                <a:spcPct val="115000"/>
+              </a:lnSpc>
+            </a:pPr>
+            <a:r>
+              <a:rPr sz="1200" b="1" i="0">
                 <a:solidFill>
                   <a:srgbClr val="F5EFE1"/>
                 </a:solidFill>
@@ -15842,13 +15911,13 @@
   <p:clrMapOvr>
     <a:masterClrMapping/>
   </p:clrMapOvr>
-  <mc:AlternateContent xmlns:mc="http://schemas.openxmlformats.org/markup-compatibility/2006" xmlns:p159="http://schemas.microsoft.com/office/powerpoint/2015/09/main">
-    <mc:Choice Requires="p159">
+  <mc:AlternateContent xmlns:mc="http://schemas.openxmlformats.org/markup-compatibility/2006">
+    <mc:Choice xmlns:p159="http://schemas.microsoft.com/office/powerpoint/2015/09/main" Requires="p159">
       <p:transition xmlns:p14="http://schemas.microsoft.com/office/powerpoint/2010/main" spd="slow" p14:dur="2000">
         <p159:morph option="byObject"/>
       </p:transition>
     </mc:Choice>
-    <mc:Fallback xmlns="">
+    <mc:Fallback>
       <p:transition spd="slow">
         <p:fade/>
       </p:transition>
@@ -16787,13 +16856,13 @@
   <p:clrMapOvr>
     <a:masterClrMapping/>
   </p:clrMapOvr>
-  <mc:AlternateContent xmlns:mc="http://schemas.openxmlformats.org/markup-compatibility/2006" xmlns:p159="http://schemas.microsoft.com/office/powerpoint/2015/09/main">
-    <mc:Choice Requires="p159">
+  <mc:AlternateContent xmlns:mc="http://schemas.openxmlformats.org/markup-compatibility/2006">
+    <mc:Choice xmlns:p159="http://schemas.microsoft.com/office/powerpoint/2015/09/main" Requires="p159">
       <p:transition xmlns:p14="http://schemas.microsoft.com/office/powerpoint/2010/main" spd="slow" p14:dur="2000">
         <p159:morph option="byObject"/>
       </p:transition>
     </mc:Choice>
-    <mc:Fallback xmlns="">
+    <mc:Fallback>
       <p:transition spd="slow">
         <p:fade/>
       </p:transition>
@@ -17988,13 +18057,13 @@
   <p:clrMapOvr>
     <a:masterClrMapping/>
   </p:clrMapOvr>
-  <mc:AlternateContent xmlns:mc="http://schemas.openxmlformats.org/markup-compatibility/2006" xmlns:p159="http://schemas.microsoft.com/office/powerpoint/2015/09/main">
-    <mc:Choice Requires="p159">
+  <mc:AlternateContent xmlns:mc="http://schemas.openxmlformats.org/markup-compatibility/2006">
+    <mc:Choice xmlns:p159="http://schemas.microsoft.com/office/powerpoint/2015/09/main" Requires="p159">
       <p:transition xmlns:p14="http://schemas.microsoft.com/office/powerpoint/2010/main" spd="slow" p14:dur="2000">
         <p159:morph option="byObject"/>
       </p:transition>
     </mc:Choice>
-    <mc:Fallback xmlns="">
+    <mc:Fallback>
       <p:transition spd="slow">
         <p:fade/>
       </p:transition>
@@ -19983,13 +20052,13 @@
   <p:clrMapOvr>
     <a:masterClrMapping/>
   </p:clrMapOvr>
-  <mc:AlternateContent xmlns:mc="http://schemas.openxmlformats.org/markup-compatibility/2006" xmlns:p159="http://schemas.microsoft.com/office/powerpoint/2015/09/main">
-    <mc:Choice Requires="p159">
+  <mc:AlternateContent xmlns:mc="http://schemas.openxmlformats.org/markup-compatibility/2006">
+    <mc:Choice xmlns:p159="http://schemas.microsoft.com/office/powerpoint/2015/09/main" Requires="p159">
       <p:transition xmlns:p14="http://schemas.microsoft.com/office/powerpoint/2010/main" spd="slow" p14:dur="2000">
         <p159:morph option="byObject"/>
       </p:transition>
     </mc:Choice>
-    <mc:Fallback xmlns="">
+    <mc:Fallback>
       <p:transition spd="slow">
         <p:fade/>
       </p:transition>
@@ -21288,13 +21357,13 @@
   <p:clrMapOvr>
     <a:masterClrMapping/>
   </p:clrMapOvr>
-  <mc:AlternateContent xmlns:mc="http://schemas.openxmlformats.org/markup-compatibility/2006" xmlns:p159="http://schemas.microsoft.com/office/powerpoint/2015/09/main">
-    <mc:Choice Requires="p159">
+  <mc:AlternateContent xmlns:mc="http://schemas.openxmlformats.org/markup-compatibility/2006">
+    <mc:Choice xmlns:p159="http://schemas.microsoft.com/office/powerpoint/2015/09/main" Requires="p159">
       <p:transition xmlns:p14="http://schemas.microsoft.com/office/powerpoint/2010/main" spd="slow" p14:dur="2000">
         <p159:morph option="byObject"/>
       </p:transition>
     </mc:Choice>
-    <mc:Fallback xmlns="">
+    <mc:Fallback>
       <p:transition spd="slow">
         <p:fade/>
       </p:transition>
@@ -23932,13 +24001,13 @@
   <p:clrMapOvr>
     <a:masterClrMapping/>
   </p:clrMapOvr>
-  <mc:AlternateContent xmlns:mc="http://schemas.openxmlformats.org/markup-compatibility/2006" xmlns:p159="http://schemas.microsoft.com/office/powerpoint/2015/09/main">
-    <mc:Choice Requires="p159">
+  <mc:AlternateContent xmlns:mc="http://schemas.openxmlformats.org/markup-compatibility/2006">
+    <mc:Choice xmlns:p159="http://schemas.microsoft.com/office/powerpoint/2015/09/main" Requires="p159">
       <p:transition xmlns:p14="http://schemas.microsoft.com/office/powerpoint/2010/main" spd="slow" p14:dur="2000">
         <p159:morph option="byObject"/>
       </p:transition>
     </mc:Choice>
-    <mc:Fallback xmlns="">
+    <mc:Fallback>
       <p:transition spd="slow">
         <p:fade/>
       </p:transition>
@@ -25187,13 +25256,13 @@
   <p:clrMapOvr>
     <a:masterClrMapping/>
   </p:clrMapOvr>
-  <mc:AlternateContent xmlns:mc="http://schemas.openxmlformats.org/markup-compatibility/2006" xmlns:p159="http://schemas.microsoft.com/office/powerpoint/2015/09/main">
-    <mc:Choice Requires="p159">
+  <mc:AlternateContent xmlns:mc="http://schemas.openxmlformats.org/markup-compatibility/2006">
+    <mc:Choice xmlns:p159="http://schemas.microsoft.com/office/powerpoint/2015/09/main" Requires="p159">
       <p:transition xmlns:p14="http://schemas.microsoft.com/office/powerpoint/2010/main" spd="slow" p14:dur="2000">
         <p159:morph option="byObject"/>
       </p:transition>
     </mc:Choice>
-    <mc:Fallback xmlns="">
+    <mc:Fallback>
       <p:transition spd="slow">
         <p:fade/>
       </p:transition>
@@ -26475,13 +26544,13 @@
   <p:clrMapOvr>
     <a:masterClrMapping/>
   </p:clrMapOvr>
-  <mc:AlternateContent xmlns:mc="http://schemas.openxmlformats.org/markup-compatibility/2006" xmlns:p159="http://schemas.microsoft.com/office/powerpoint/2015/09/main">
-    <mc:Choice Requires="p159">
+  <mc:AlternateContent xmlns:mc="http://schemas.openxmlformats.org/markup-compatibility/2006">
+    <mc:Choice xmlns:p159="http://schemas.microsoft.com/office/powerpoint/2015/09/main" Requires="p159">
       <p:transition xmlns:p14="http://schemas.microsoft.com/office/powerpoint/2010/main" spd="slow" p14:dur="2000">
         <p159:morph option="byObject"/>
       </p:transition>
     </mc:Choice>
-    <mc:Fallback xmlns="">
+    <mc:Fallback>
       <p:transition spd="slow">
         <p:fade/>
       </p:transition>
@@ -27901,13 +27970,13 @@
   <p:clrMapOvr>
     <a:masterClrMapping/>
   </p:clrMapOvr>
-  <mc:AlternateContent xmlns:mc="http://schemas.openxmlformats.org/markup-compatibility/2006" xmlns:p159="http://schemas.microsoft.com/office/powerpoint/2015/09/main">
-    <mc:Choice Requires="p159">
+  <mc:AlternateContent xmlns:mc="http://schemas.openxmlformats.org/markup-compatibility/2006">
+    <mc:Choice xmlns:p159="http://schemas.microsoft.com/office/powerpoint/2015/09/main" Requires="p159">
       <p:transition xmlns:p14="http://schemas.microsoft.com/office/powerpoint/2010/main" spd="slow" p14:dur="2000">
         <p159:morph option="byObject"/>
       </p:transition>
     </mc:Choice>
-    <mc:Fallback xmlns="">
+    <mc:Fallback>
       <p:transition spd="slow">
         <p:fade/>
       </p:transition>
